--- a/Web Development Course/L22-loops/L22_loops.pptx
+++ b/Web Development Course/L22-loops/L22_loops.pptx
@@ -308,7 +308,7 @@
           <a:p>
             <a:fld id="{4AAD347D-5ACD-4C99-B74B-A9C85AD731AF}" type="datetimeFigureOut">
               <a:rPr lang="en-US" dirty="0"/>
-              <a:t>1/4/2026</a:t>
+              <a:t>1/6/2026</a:t>
             </a:fld>
             <a:endParaRPr lang="en-US" dirty="0"/>
           </a:p>
@@ -586,7 +586,7 @@
           <a:p>
             <a:fld id="{4509A250-FF31-4206-8172-F9D3106AACB1}" type="datetimeFigureOut">
               <a:rPr lang="en-US" dirty="0"/>
-              <a:t>1/4/2026</a:t>
+              <a:t>1/6/2026</a:t>
             </a:fld>
             <a:endParaRPr lang="en-US" dirty="0"/>
           </a:p>
@@ -783,7 +783,7 @@
           <a:p>
             <a:fld id="{4509A250-FF31-4206-8172-F9D3106AACB1}" type="datetimeFigureOut">
               <a:rPr lang="en-US" dirty="0"/>
-              <a:t>1/4/2026</a:t>
+              <a:t>1/6/2026</a:t>
             </a:fld>
             <a:endParaRPr lang="en-US" dirty="0"/>
           </a:p>
@@ -1054,7 +1054,7 @@
           <a:p>
             <a:fld id="{4509A250-FF31-4206-8172-F9D3106AACB1}" type="datetimeFigureOut">
               <a:rPr lang="en-US" dirty="0"/>
-              <a:t>1/4/2026</a:t>
+              <a:t>1/6/2026</a:t>
             </a:fld>
             <a:endParaRPr lang="en-US" dirty="0"/>
           </a:p>
@@ -1389,7 +1389,7 @@
           <a:p>
             <a:fld id="{4509A250-FF31-4206-8172-F9D3106AACB1}" type="datetimeFigureOut">
               <a:rPr lang="en-US" dirty="0"/>
-              <a:t>1/4/2026</a:t>
+              <a:t>1/6/2026</a:t>
             </a:fld>
             <a:endParaRPr lang="en-US" dirty="0"/>
           </a:p>
@@ -2002,7 +2002,7 @@
           <a:p>
             <a:fld id="{4509A250-FF31-4206-8172-F9D3106AACB1}" type="datetimeFigureOut">
               <a:rPr lang="en-US" dirty="0"/>
-              <a:t>1/4/2026</a:t>
+              <a:t>1/6/2026</a:t>
             </a:fld>
             <a:endParaRPr lang="en-US" dirty="0"/>
           </a:p>
@@ -2852,7 +2852,7 @@
           <a:p>
             <a:fld id="{4509A250-FF31-4206-8172-F9D3106AACB1}" type="datetimeFigureOut">
               <a:rPr lang="en-US" dirty="0"/>
-              <a:t>1/4/2026</a:t>
+              <a:t>1/6/2026</a:t>
             </a:fld>
             <a:endParaRPr lang="en-US" dirty="0"/>
           </a:p>
@@ -3025,7 +3025,7 @@
           <a:p>
             <a:fld id="{4509A250-FF31-4206-8172-F9D3106AACB1}" type="datetimeFigureOut">
               <a:rPr lang="en-US" dirty="0"/>
-              <a:t>1/4/2026</a:t>
+              <a:t>1/6/2026</a:t>
             </a:fld>
             <a:endParaRPr lang="en-US" dirty="0"/>
           </a:p>
@@ -3208,7 +3208,7 @@
           <a:p>
             <a:fld id="{4509A250-FF31-4206-8172-F9D3106AACB1}" type="datetimeFigureOut">
               <a:rPr lang="en-US" dirty="0"/>
-              <a:t>1/4/2026</a:t>
+              <a:t>1/6/2026</a:t>
             </a:fld>
             <a:endParaRPr lang="en-US" dirty="0"/>
           </a:p>
@@ -3381,7 +3381,7 @@
           <a:p>
             <a:fld id="{4509A250-FF31-4206-8172-F9D3106AACB1}" type="datetimeFigureOut">
               <a:rPr lang="en-US" dirty="0"/>
-              <a:t>1/4/2026</a:t>
+              <a:t>1/6/2026</a:t>
             </a:fld>
             <a:endParaRPr lang="en-US" dirty="0"/>
           </a:p>
@@ -3628,7 +3628,7 @@
           <a:p>
             <a:fld id="{4509A250-FF31-4206-8172-F9D3106AACB1}" type="datetimeFigureOut">
               <a:rPr lang="en-US" dirty="0"/>
-              <a:t>1/4/2026</a:t>
+              <a:t>1/6/2026</a:t>
             </a:fld>
             <a:endParaRPr lang="en-US" dirty="0"/>
           </a:p>
@@ -3923,7 +3923,7 @@
           <a:p>
             <a:fld id="{4509A250-FF31-4206-8172-F9D3106AACB1}" type="datetimeFigureOut">
               <a:rPr lang="en-US" dirty="0"/>
-              <a:t>1/4/2026</a:t>
+              <a:t>1/6/2026</a:t>
             </a:fld>
             <a:endParaRPr lang="en-US" dirty="0"/>
           </a:p>
@@ -4364,7 +4364,7 @@
           <a:p>
             <a:fld id="{4509A250-FF31-4206-8172-F9D3106AACB1}" type="datetimeFigureOut">
               <a:rPr lang="en-US" dirty="0"/>
-              <a:t>1/4/2026</a:t>
+              <a:t>1/6/2026</a:t>
             </a:fld>
             <a:endParaRPr lang="en-US" dirty="0"/>
           </a:p>
@@ -4485,7 +4485,7 @@
           <a:p>
             <a:fld id="{4509A250-FF31-4206-8172-F9D3106AACB1}" type="datetimeFigureOut">
               <a:rPr lang="en-US" dirty="0"/>
-              <a:t>1/4/2026</a:t>
+              <a:t>1/6/2026</a:t>
             </a:fld>
             <a:endParaRPr lang="en-US" dirty="0"/>
           </a:p>
@@ -4583,7 +4583,7 @@
           <a:p>
             <a:fld id="{4509A250-FF31-4206-8172-F9D3106AACB1}" type="datetimeFigureOut">
               <a:rPr lang="en-US" dirty="0"/>
-              <a:t>1/4/2026</a:t>
+              <a:t>1/6/2026</a:t>
             </a:fld>
             <a:endParaRPr lang="en-US" dirty="0"/>
           </a:p>
@@ -4865,7 +4865,7 @@
           <a:p>
             <a:fld id="{4509A250-FF31-4206-8172-F9D3106AACB1}" type="datetimeFigureOut">
               <a:rPr lang="en-US" dirty="0"/>
-              <a:t>1/4/2026</a:t>
+              <a:t>1/6/2026</a:t>
             </a:fld>
             <a:endParaRPr lang="en-US" dirty="0"/>
           </a:p>
@@ -5143,7 +5143,7 @@
           <a:p>
             <a:fld id="{4509A250-FF31-4206-8172-F9D3106AACB1}" type="datetimeFigureOut">
               <a:rPr lang="en-US" dirty="0"/>
-              <a:t>1/4/2026</a:t>
+              <a:t>1/6/2026</a:t>
             </a:fld>
             <a:endParaRPr lang="en-US" dirty="0"/>
           </a:p>
@@ -5575,7 +5575,7 @@
           <a:p>
             <a:fld id="{4509A250-FF31-4206-8172-F9D3106AACB1}" type="datetimeFigureOut">
               <a:rPr lang="en-US" dirty="0"/>
-              <a:t>1/4/2026</a:t>
+              <a:t>1/6/2026</a:t>
             </a:fld>
             <a:endParaRPr lang="en-US" dirty="0"/>
           </a:p>
@@ -7653,11 +7653,7 @@
           <a:p>
             <a:r>
               <a:rPr lang="en-US" b="1" dirty="0" smtClean="0"/>
-              <a:t>Topic : </a:t>
-            </a:r>
-            <a:r>
-              <a:rPr lang="en-US" b="1" dirty="0" smtClean="0"/>
-              <a:t>Loops (for, while, Do while) loops</a:t>
+              <a:t>Topic : Loops (for, while, Do while) loops</a:t>
             </a:r>
             <a:endParaRPr lang="en-US" b="1" dirty="0"/>
           </a:p>
@@ -8204,7 +8200,6 @@
               <a:rPr lang="en-US" sz="4000" b="1" dirty="0"/>
               <a:t>What Are Loops in Programming?</a:t>
             </a:r>
-            <a:endParaRPr lang="en-US" sz="4000" b="1" dirty="0"/>
           </a:p>
         </p:txBody>
       </p:sp>
@@ -8428,7 +8423,7 @@
         </p:nvSpPr>
         <p:spPr>
           <a:xfrm>
-            <a:off x="465826" y="162464"/>
+            <a:off x="465826" y="127958"/>
             <a:ext cx="11628408" cy="1174630"/>
           </a:xfrm>
         </p:spPr>
@@ -8440,7 +8435,6 @@
               <a:rPr lang="en-US" sz="4000" b="1" dirty="0"/>
               <a:t>for Loop – Fixed and Predictable Tasks</a:t>
             </a:r>
-            <a:endParaRPr lang="en-US" sz="4000" b="1" dirty="0"/>
           </a:p>
         </p:txBody>
       </p:sp>
@@ -8676,7 +8670,6 @@
               <a:rPr lang="en-US" sz="3600" b="1" dirty="0"/>
               <a:t>while Loop – Condition-Driven Execution</a:t>
             </a:r>
-            <a:endParaRPr lang="en-US" sz="3600" b="1" dirty="0"/>
           </a:p>
         </p:txBody>
       </p:sp>
@@ -8771,7 +8764,7 @@
             </a:pPr>
             <a:r>
               <a:rPr lang="en-US" sz="2400" dirty="0" smtClean="0"/>
-              <a:t>he </a:t>
+              <a:t>The </a:t>
             </a:r>
             <a:r>
               <a:rPr lang="en-US" sz="2400" dirty="0"/>
@@ -9148,7 +9141,6 @@
               <a:rPr lang="en-US" b="1" dirty="0"/>
               <a:t>Why for Loop Alone Is Not Enough</a:t>
             </a:r>
-            <a:endParaRPr lang="en-US" b="1" dirty="0"/>
           </a:p>
         </p:txBody>
       </p:sp>
@@ -9384,7 +9376,6 @@
               <a:rPr lang="en-US" b="1" dirty="0"/>
               <a:t>Practical Programming Comparison</a:t>
             </a:r>
-            <a:endParaRPr lang="en-US" b="1" dirty="0"/>
           </a:p>
         </p:txBody>
       </p:sp>
